--- a/06. Node/Node.js.pptx
+++ b/06. Node/Node.js.pptx
@@ -293,389 +293,6 @@
 
 <file path=ppt/changesInfos/changesInfo1.xml><?xml version="1.0" encoding="utf-8"?>
 <pc:chgInfo xmlns:a="http://schemas.openxmlformats.org/drawingml/2006/main" xmlns:r="http://schemas.openxmlformats.org/officeDocument/2006/relationships" xmlns:ac="http://schemas.microsoft.com/office/drawing/2013/main/command" xmlns:pc="http://schemas.microsoft.com/office/powerpoint/2013/main/command">
-  <pc:docChgLst>
-    <pc:chgData name="Riccardo Berta" userId="c8694f89-bba4-4576-b0a8-456619ca5a8c" providerId="ADAL" clId="{35C5D11B-424E-5B41-A9C4-509DD0A59BFD}"/>
-    <pc:docChg chg="custSel delSld modSld sldOrd">
-      <pc:chgData name="Riccardo Berta" userId="c8694f89-bba4-4576-b0a8-456619ca5a8c" providerId="ADAL" clId="{35C5D11B-424E-5B41-A9C4-509DD0A59BFD}" dt="2022-04-01T12:12:56.906" v="135" actId="20577"/>
-      <pc:docMkLst>
-        <pc:docMk/>
-      </pc:docMkLst>
-      <pc:sldChg chg="modSp">
-        <pc:chgData name="Riccardo Berta" userId="c8694f89-bba4-4576-b0a8-456619ca5a8c" providerId="ADAL" clId="{35C5D11B-424E-5B41-A9C4-509DD0A59BFD}" dt="2022-03-22T07:34:03.014" v="5"/>
-        <pc:sldMkLst>
-          <pc:docMk/>
-          <pc:sldMk cId="0" sldId="257"/>
-        </pc:sldMkLst>
-        <pc:picChg chg="mod">
-          <ac:chgData name="Riccardo Berta" userId="c8694f89-bba4-4576-b0a8-456619ca5a8c" providerId="ADAL" clId="{35C5D11B-424E-5B41-A9C4-509DD0A59BFD}" dt="2022-03-22T07:34:03.014" v="5"/>
-          <ac:picMkLst>
-            <pc:docMk/>
-            <pc:sldMk cId="0" sldId="257"/>
-            <ac:picMk id="85" creationId="{00000000-0000-0000-0000-000000000000}"/>
-          </ac:picMkLst>
-        </pc:picChg>
-      </pc:sldChg>
-      <pc:sldChg chg="modSp">
-        <pc:chgData name="Riccardo Berta" userId="c8694f89-bba4-4576-b0a8-456619ca5a8c" providerId="ADAL" clId="{35C5D11B-424E-5B41-A9C4-509DD0A59BFD}" dt="2022-03-22T07:34:23.187" v="6"/>
-        <pc:sldMkLst>
-          <pc:docMk/>
-          <pc:sldMk cId="0" sldId="258"/>
-        </pc:sldMkLst>
-        <pc:picChg chg="mod">
-          <ac:chgData name="Riccardo Berta" userId="c8694f89-bba4-4576-b0a8-456619ca5a8c" providerId="ADAL" clId="{35C5D11B-424E-5B41-A9C4-509DD0A59BFD}" dt="2022-03-22T07:34:23.187" v="6"/>
-          <ac:picMkLst>
-            <pc:docMk/>
-            <pc:sldMk cId="0" sldId="258"/>
-            <ac:picMk id="92" creationId="{00000000-0000-0000-0000-000000000000}"/>
-          </ac:picMkLst>
-        </pc:picChg>
-      </pc:sldChg>
-      <pc:sldChg chg="modSp">
-        <pc:chgData name="Riccardo Berta" userId="c8694f89-bba4-4576-b0a8-456619ca5a8c" providerId="ADAL" clId="{35C5D11B-424E-5B41-A9C4-509DD0A59BFD}" dt="2022-03-22T07:39:20.191" v="16"/>
-        <pc:sldMkLst>
-          <pc:docMk/>
-          <pc:sldMk cId="0" sldId="259"/>
-        </pc:sldMkLst>
-        <pc:picChg chg="mod">
-          <ac:chgData name="Riccardo Berta" userId="c8694f89-bba4-4576-b0a8-456619ca5a8c" providerId="ADAL" clId="{35C5D11B-424E-5B41-A9C4-509DD0A59BFD}" dt="2022-03-22T07:38:22.524" v="12"/>
-          <ac:picMkLst>
-            <pc:docMk/>
-            <pc:sldMk cId="0" sldId="259"/>
-            <ac:picMk id="99" creationId="{00000000-0000-0000-0000-000000000000}"/>
-          </ac:picMkLst>
-        </pc:picChg>
-        <pc:picChg chg="mod">
-          <ac:chgData name="Riccardo Berta" userId="c8694f89-bba4-4576-b0a8-456619ca5a8c" providerId="ADAL" clId="{35C5D11B-424E-5B41-A9C4-509DD0A59BFD}" dt="2022-03-22T07:38:34.539" v="13"/>
-          <ac:picMkLst>
-            <pc:docMk/>
-            <pc:sldMk cId="0" sldId="259"/>
-            <ac:picMk id="100" creationId="{00000000-0000-0000-0000-000000000000}"/>
-          </ac:picMkLst>
-        </pc:picChg>
-        <pc:picChg chg="mod">
-          <ac:chgData name="Riccardo Berta" userId="c8694f89-bba4-4576-b0a8-456619ca5a8c" providerId="ADAL" clId="{35C5D11B-424E-5B41-A9C4-509DD0A59BFD}" dt="2022-03-22T07:38:47.480" v="14"/>
-          <ac:picMkLst>
-            <pc:docMk/>
-            <pc:sldMk cId="0" sldId="259"/>
-            <ac:picMk id="101" creationId="{00000000-0000-0000-0000-000000000000}"/>
-          </ac:picMkLst>
-        </pc:picChg>
-        <pc:picChg chg="mod">
-          <ac:chgData name="Riccardo Berta" userId="c8694f89-bba4-4576-b0a8-456619ca5a8c" providerId="ADAL" clId="{35C5D11B-424E-5B41-A9C4-509DD0A59BFD}" dt="2022-03-22T07:38:59.538" v="15"/>
-          <ac:picMkLst>
-            <pc:docMk/>
-            <pc:sldMk cId="0" sldId="259"/>
-            <ac:picMk id="102" creationId="{00000000-0000-0000-0000-000000000000}"/>
-          </ac:picMkLst>
-        </pc:picChg>
-        <pc:picChg chg="mod">
-          <ac:chgData name="Riccardo Berta" userId="c8694f89-bba4-4576-b0a8-456619ca5a8c" providerId="ADAL" clId="{35C5D11B-424E-5B41-A9C4-509DD0A59BFD}" dt="2022-03-22T07:39:20.191" v="16"/>
-          <ac:picMkLst>
-            <pc:docMk/>
-            <pc:sldMk cId="0" sldId="259"/>
-            <ac:picMk id="103" creationId="{00000000-0000-0000-0000-000000000000}"/>
-          </ac:picMkLst>
-        </pc:picChg>
-      </pc:sldChg>
-      <pc:sldChg chg="modSp mod">
-        <pc:chgData name="Riccardo Berta" userId="c8694f89-bba4-4576-b0a8-456619ca5a8c" providerId="ADAL" clId="{35C5D11B-424E-5B41-A9C4-509DD0A59BFD}" dt="2022-03-23T07:58:19.601" v="41" actId="20577"/>
-        <pc:sldMkLst>
-          <pc:docMk/>
-          <pc:sldMk cId="0" sldId="260"/>
-        </pc:sldMkLst>
-        <pc:spChg chg="mod">
-          <ac:chgData name="Riccardo Berta" userId="c8694f89-bba4-4576-b0a8-456619ca5a8c" providerId="ADAL" clId="{35C5D11B-424E-5B41-A9C4-509DD0A59BFD}" dt="2022-03-23T07:58:19.601" v="41" actId="20577"/>
-          <ac:spMkLst>
-            <pc:docMk/>
-            <pc:sldMk cId="0" sldId="260"/>
-            <ac:spMk id="109" creationId="{00000000-0000-0000-0000-000000000000}"/>
-          </ac:spMkLst>
-        </pc:spChg>
-        <pc:picChg chg="mod">
-          <ac:chgData name="Riccardo Berta" userId="c8694f89-bba4-4576-b0a8-456619ca5a8c" providerId="ADAL" clId="{35C5D11B-424E-5B41-A9C4-509DD0A59BFD}" dt="2022-03-22T07:40:02.780" v="18"/>
-          <ac:picMkLst>
-            <pc:docMk/>
-            <pc:sldMk cId="0" sldId="260"/>
-            <ac:picMk id="110" creationId="{00000000-0000-0000-0000-000000000000}"/>
-          </ac:picMkLst>
-        </pc:picChg>
-        <pc:picChg chg="mod">
-          <ac:chgData name="Riccardo Berta" userId="c8694f89-bba4-4576-b0a8-456619ca5a8c" providerId="ADAL" clId="{35C5D11B-424E-5B41-A9C4-509DD0A59BFD}" dt="2022-03-22T07:39:46.143" v="17"/>
-          <ac:picMkLst>
-            <pc:docMk/>
-            <pc:sldMk cId="0" sldId="260"/>
-            <ac:picMk id="111" creationId="{00000000-0000-0000-0000-000000000000}"/>
-          </ac:picMkLst>
-        </pc:picChg>
-      </pc:sldChg>
-      <pc:sldChg chg="modSp">
-        <pc:chgData name="Riccardo Berta" userId="c8694f89-bba4-4576-b0a8-456619ca5a8c" providerId="ADAL" clId="{35C5D11B-424E-5B41-A9C4-509DD0A59BFD}" dt="2022-03-22T07:42:45.729" v="19"/>
-        <pc:sldMkLst>
-          <pc:docMk/>
-          <pc:sldMk cId="0" sldId="261"/>
-        </pc:sldMkLst>
-        <pc:picChg chg="mod">
-          <ac:chgData name="Riccardo Berta" userId="c8694f89-bba4-4576-b0a8-456619ca5a8c" providerId="ADAL" clId="{35C5D11B-424E-5B41-A9C4-509DD0A59BFD}" dt="2022-03-22T07:42:45.729" v="19"/>
-          <ac:picMkLst>
-            <pc:docMk/>
-            <pc:sldMk cId="0" sldId="261"/>
-            <ac:picMk id="119" creationId="{00000000-0000-0000-0000-000000000000}"/>
-          </ac:picMkLst>
-        </pc:picChg>
-      </pc:sldChg>
-      <pc:sldChg chg="modSp mod modNotes">
-        <pc:chgData name="Riccardo Berta" userId="c8694f89-bba4-4576-b0a8-456619ca5a8c" providerId="ADAL" clId="{35C5D11B-424E-5B41-A9C4-509DD0A59BFD}" dt="2022-03-25T14:38:53.205" v="88" actId="20577"/>
-        <pc:sldMkLst>
-          <pc:docMk/>
-          <pc:sldMk cId="0" sldId="262"/>
-        </pc:sldMkLst>
-        <pc:spChg chg="mod">
-          <ac:chgData name="Riccardo Berta" userId="c8694f89-bba4-4576-b0a8-456619ca5a8c" providerId="ADAL" clId="{35C5D11B-424E-5B41-A9C4-509DD0A59BFD}" dt="2022-03-25T14:38:53.205" v="88" actId="20577"/>
-          <ac:spMkLst>
-            <pc:docMk/>
-            <pc:sldMk cId="0" sldId="262"/>
-            <ac:spMk id="125" creationId="{00000000-0000-0000-0000-000000000000}"/>
-          </ac:spMkLst>
-        </pc:spChg>
-        <pc:picChg chg="mod">
-          <ac:chgData name="Riccardo Berta" userId="c8694f89-bba4-4576-b0a8-456619ca5a8c" providerId="ADAL" clId="{35C5D11B-424E-5B41-A9C4-509DD0A59BFD}" dt="2022-03-22T07:43:02.767" v="20"/>
-          <ac:picMkLst>
-            <pc:docMk/>
-            <pc:sldMk cId="0" sldId="262"/>
-            <ac:picMk id="126" creationId="{00000000-0000-0000-0000-000000000000}"/>
-          </ac:picMkLst>
-        </pc:picChg>
-      </pc:sldChg>
-      <pc:sldChg chg="modSp">
-        <pc:chgData name="Riccardo Berta" userId="c8694f89-bba4-4576-b0a8-456619ca5a8c" providerId="ADAL" clId="{35C5D11B-424E-5B41-A9C4-509DD0A59BFD}" dt="2022-03-22T07:43:16.691" v="21"/>
-        <pc:sldMkLst>
-          <pc:docMk/>
-          <pc:sldMk cId="0" sldId="263"/>
-        </pc:sldMkLst>
-        <pc:picChg chg="mod">
-          <ac:chgData name="Riccardo Berta" userId="c8694f89-bba4-4576-b0a8-456619ca5a8c" providerId="ADAL" clId="{35C5D11B-424E-5B41-A9C4-509DD0A59BFD}" dt="2022-03-22T07:43:16.691" v="21"/>
-          <ac:picMkLst>
-            <pc:docMk/>
-            <pc:sldMk cId="0" sldId="263"/>
-            <ac:picMk id="133" creationId="{00000000-0000-0000-0000-000000000000}"/>
-          </ac:picMkLst>
-        </pc:picChg>
-      </pc:sldChg>
-      <pc:sldChg chg="modSp mod">
-        <pc:chgData name="Riccardo Berta" userId="c8694f89-bba4-4576-b0a8-456619ca5a8c" providerId="ADAL" clId="{35C5D11B-424E-5B41-A9C4-509DD0A59BFD}" dt="2022-03-25T15:16:54.434" v="126" actId="20577"/>
-        <pc:sldMkLst>
-          <pc:docMk/>
-          <pc:sldMk cId="0" sldId="264"/>
-        </pc:sldMkLst>
-        <pc:spChg chg="mod">
-          <ac:chgData name="Riccardo Berta" userId="c8694f89-bba4-4576-b0a8-456619ca5a8c" providerId="ADAL" clId="{35C5D11B-424E-5B41-A9C4-509DD0A59BFD}" dt="2022-03-25T15:16:54.434" v="126" actId="20577"/>
-          <ac:spMkLst>
-            <pc:docMk/>
-            <pc:sldMk cId="0" sldId="264"/>
-            <ac:spMk id="139" creationId="{00000000-0000-0000-0000-000000000000}"/>
-          </ac:spMkLst>
-        </pc:spChg>
-        <pc:picChg chg="mod">
-          <ac:chgData name="Riccardo Berta" userId="c8694f89-bba4-4576-b0a8-456619ca5a8c" providerId="ADAL" clId="{35C5D11B-424E-5B41-A9C4-509DD0A59BFD}" dt="2022-03-22T07:43:33.267" v="22"/>
-          <ac:picMkLst>
-            <pc:docMk/>
-            <pc:sldMk cId="0" sldId="264"/>
-            <ac:picMk id="141" creationId="{00000000-0000-0000-0000-000000000000}"/>
-          </ac:picMkLst>
-        </pc:picChg>
-        <pc:picChg chg="mod">
-          <ac:chgData name="Riccardo Berta" userId="c8694f89-bba4-4576-b0a8-456619ca5a8c" providerId="ADAL" clId="{35C5D11B-424E-5B41-A9C4-509DD0A59BFD}" dt="2022-03-22T07:43:50.362" v="23"/>
-          <ac:picMkLst>
-            <pc:docMk/>
-            <pc:sldMk cId="0" sldId="264"/>
-            <ac:picMk id="142" creationId="{00000000-0000-0000-0000-000000000000}"/>
-          </ac:picMkLst>
-        </pc:picChg>
-      </pc:sldChg>
-      <pc:sldChg chg="modSp">
-        <pc:chgData name="Riccardo Berta" userId="c8694f89-bba4-4576-b0a8-456619ca5a8c" providerId="ADAL" clId="{35C5D11B-424E-5B41-A9C4-509DD0A59BFD}" dt="2022-03-22T07:44:03.240" v="24"/>
-        <pc:sldMkLst>
-          <pc:docMk/>
-          <pc:sldMk cId="0" sldId="265"/>
-        </pc:sldMkLst>
-        <pc:picChg chg="mod">
-          <ac:chgData name="Riccardo Berta" userId="c8694f89-bba4-4576-b0a8-456619ca5a8c" providerId="ADAL" clId="{35C5D11B-424E-5B41-A9C4-509DD0A59BFD}" dt="2022-03-22T07:44:03.240" v="24"/>
-          <ac:picMkLst>
-            <pc:docMk/>
-            <pc:sldMk cId="0" sldId="265"/>
-            <ac:picMk id="149" creationId="{00000000-0000-0000-0000-000000000000}"/>
-          </ac:picMkLst>
-        </pc:picChg>
-      </pc:sldChg>
-      <pc:sldChg chg="modSp">
-        <pc:chgData name="Riccardo Berta" userId="c8694f89-bba4-4576-b0a8-456619ca5a8c" providerId="ADAL" clId="{35C5D11B-424E-5B41-A9C4-509DD0A59BFD}" dt="2022-03-22T07:44:22.734" v="25"/>
-        <pc:sldMkLst>
-          <pc:docMk/>
-          <pc:sldMk cId="0" sldId="266"/>
-        </pc:sldMkLst>
-        <pc:picChg chg="mod">
-          <ac:chgData name="Riccardo Berta" userId="c8694f89-bba4-4576-b0a8-456619ca5a8c" providerId="ADAL" clId="{35C5D11B-424E-5B41-A9C4-509DD0A59BFD}" dt="2022-03-22T07:44:22.734" v="25"/>
-          <ac:picMkLst>
-            <pc:docMk/>
-            <pc:sldMk cId="0" sldId="266"/>
-            <ac:picMk id="156" creationId="{00000000-0000-0000-0000-000000000000}"/>
-          </ac:picMkLst>
-        </pc:picChg>
-      </pc:sldChg>
-      <pc:sldChg chg="modSp mod">
-        <pc:chgData name="Riccardo Berta" userId="c8694f89-bba4-4576-b0a8-456619ca5a8c" providerId="ADAL" clId="{35C5D11B-424E-5B41-A9C4-509DD0A59BFD}" dt="2022-04-01T12:12:56.906" v="135" actId="20577"/>
-        <pc:sldMkLst>
-          <pc:docMk/>
-          <pc:sldMk cId="0" sldId="267"/>
-        </pc:sldMkLst>
-        <pc:spChg chg="mod">
-          <ac:chgData name="Riccardo Berta" userId="c8694f89-bba4-4576-b0a8-456619ca5a8c" providerId="ADAL" clId="{35C5D11B-424E-5B41-A9C4-509DD0A59BFD}" dt="2022-04-01T12:12:56.906" v="135" actId="20577"/>
-          <ac:spMkLst>
-            <pc:docMk/>
-            <pc:sldMk cId="0" sldId="267"/>
-            <ac:spMk id="162" creationId="{00000000-0000-0000-0000-000000000000}"/>
-          </ac:spMkLst>
-        </pc:spChg>
-        <pc:picChg chg="mod">
-          <ac:chgData name="Riccardo Berta" userId="c8694f89-bba4-4576-b0a8-456619ca5a8c" providerId="ADAL" clId="{35C5D11B-424E-5B41-A9C4-509DD0A59BFD}" dt="2022-03-22T07:44:34.392" v="26"/>
-          <ac:picMkLst>
-            <pc:docMk/>
-            <pc:sldMk cId="0" sldId="267"/>
-            <ac:picMk id="163" creationId="{00000000-0000-0000-0000-000000000000}"/>
-          </ac:picMkLst>
-        </pc:picChg>
-      </pc:sldChg>
-      <pc:sldChg chg="del">
-        <pc:chgData name="Riccardo Berta" userId="c8694f89-bba4-4576-b0a8-456619ca5a8c" providerId="ADAL" clId="{35C5D11B-424E-5B41-A9C4-509DD0A59BFD}" dt="2022-03-22T07:29:13.529" v="3" actId="2696"/>
-        <pc:sldMkLst>
-          <pc:docMk/>
-          <pc:sldMk cId="0" sldId="268"/>
-        </pc:sldMkLst>
-      </pc:sldChg>
-      <pc:sldChg chg="modSp">
-        <pc:chgData name="Riccardo Berta" userId="c8694f89-bba4-4576-b0a8-456619ca5a8c" providerId="ADAL" clId="{35C5D11B-424E-5B41-A9C4-509DD0A59BFD}" dt="2022-03-22T07:44:59.403" v="28"/>
-        <pc:sldMkLst>
-          <pc:docMk/>
-          <pc:sldMk cId="0" sldId="269"/>
-        </pc:sldMkLst>
-        <pc:picChg chg="mod">
-          <ac:chgData name="Riccardo Berta" userId="c8694f89-bba4-4576-b0a8-456619ca5a8c" providerId="ADAL" clId="{35C5D11B-424E-5B41-A9C4-509DD0A59BFD}" dt="2022-03-22T07:44:47.754" v="27"/>
-          <ac:picMkLst>
-            <pc:docMk/>
-            <pc:sldMk cId="0" sldId="269"/>
-            <ac:picMk id="176" creationId="{00000000-0000-0000-0000-000000000000}"/>
-          </ac:picMkLst>
-        </pc:picChg>
-        <pc:picChg chg="mod">
-          <ac:chgData name="Riccardo Berta" userId="c8694f89-bba4-4576-b0a8-456619ca5a8c" providerId="ADAL" clId="{35C5D11B-424E-5B41-A9C4-509DD0A59BFD}" dt="2022-03-22T07:44:59.403" v="28"/>
-          <ac:picMkLst>
-            <pc:docMk/>
-            <pc:sldMk cId="0" sldId="269"/>
-            <ac:picMk id="177" creationId="{00000000-0000-0000-0000-000000000000}"/>
-          </ac:picMkLst>
-        </pc:picChg>
-      </pc:sldChg>
-      <pc:sldChg chg="modSp mod">
-        <pc:chgData name="Riccardo Berta" userId="c8694f89-bba4-4576-b0a8-456619ca5a8c" providerId="ADAL" clId="{35C5D11B-424E-5B41-A9C4-509DD0A59BFD}" dt="2022-03-22T07:47:03.443" v="33"/>
-        <pc:sldMkLst>
-          <pc:docMk/>
-          <pc:sldMk cId="0" sldId="270"/>
-        </pc:sldMkLst>
-        <pc:picChg chg="mod">
-          <ac:chgData name="Riccardo Berta" userId="c8694f89-bba4-4576-b0a8-456619ca5a8c" providerId="ADAL" clId="{35C5D11B-424E-5B41-A9C4-509DD0A59BFD}" dt="2022-03-22T07:46:52.226" v="32"/>
-          <ac:picMkLst>
-            <pc:docMk/>
-            <pc:sldMk cId="0" sldId="270"/>
-            <ac:picMk id="184" creationId="{00000000-0000-0000-0000-000000000000}"/>
-          </ac:picMkLst>
-        </pc:picChg>
-        <pc:picChg chg="mod">
-          <ac:chgData name="Riccardo Berta" userId="c8694f89-bba4-4576-b0a8-456619ca5a8c" providerId="ADAL" clId="{35C5D11B-424E-5B41-A9C4-509DD0A59BFD}" dt="2022-03-22T07:47:03.443" v="33"/>
-          <ac:picMkLst>
-            <pc:docMk/>
-            <pc:sldMk cId="0" sldId="270"/>
-            <ac:picMk id="185" creationId="{00000000-0000-0000-0000-000000000000}"/>
-          </ac:picMkLst>
-        </pc:picChg>
-      </pc:sldChg>
-      <pc:sldChg chg="modSp mod">
-        <pc:chgData name="Riccardo Berta" userId="c8694f89-bba4-4576-b0a8-456619ca5a8c" providerId="ADAL" clId="{35C5D11B-424E-5B41-A9C4-509DD0A59BFD}" dt="2022-03-22T07:47:51.976" v="38"/>
-        <pc:sldMkLst>
-          <pc:docMk/>
-          <pc:sldMk cId="0" sldId="271"/>
-        </pc:sldMkLst>
-        <pc:picChg chg="mod">
-          <ac:chgData name="Riccardo Berta" userId="c8694f89-bba4-4576-b0a8-456619ca5a8c" providerId="ADAL" clId="{35C5D11B-424E-5B41-A9C4-509DD0A59BFD}" dt="2022-03-22T07:47:14.728" v="34"/>
-          <ac:picMkLst>
-            <pc:docMk/>
-            <pc:sldMk cId="0" sldId="271"/>
-            <ac:picMk id="193" creationId="{00000000-0000-0000-0000-000000000000}"/>
-          </ac:picMkLst>
-        </pc:picChg>
-        <pc:picChg chg="mod">
-          <ac:chgData name="Riccardo Berta" userId="c8694f89-bba4-4576-b0a8-456619ca5a8c" providerId="ADAL" clId="{35C5D11B-424E-5B41-A9C4-509DD0A59BFD}" dt="2022-03-22T07:47:31.485" v="36"/>
-          <ac:picMkLst>
-            <pc:docMk/>
-            <pc:sldMk cId="0" sldId="271"/>
-            <ac:picMk id="194" creationId="{00000000-0000-0000-0000-000000000000}"/>
-          </ac:picMkLst>
-        </pc:picChg>
-        <pc:picChg chg="mod">
-          <ac:chgData name="Riccardo Berta" userId="c8694f89-bba4-4576-b0a8-456619ca5a8c" providerId="ADAL" clId="{35C5D11B-424E-5B41-A9C4-509DD0A59BFD}" dt="2022-03-22T07:47:51.976" v="38"/>
-          <ac:picMkLst>
-            <pc:docMk/>
-            <pc:sldMk cId="0" sldId="271"/>
-            <ac:picMk id="195" creationId="{00000000-0000-0000-0000-000000000000}"/>
-          </ac:picMkLst>
-        </pc:picChg>
-      </pc:sldChg>
-      <pc:sldChg chg="modSp mod ord">
-        <pc:chgData name="Riccardo Berta" userId="c8694f89-bba4-4576-b0a8-456619ca5a8c" providerId="ADAL" clId="{35C5D11B-424E-5B41-A9C4-509DD0A59BFD}" dt="2022-03-22T07:29:04.952" v="2"/>
-        <pc:sldMkLst>
-          <pc:docMk/>
-          <pc:sldMk cId="0" sldId="272"/>
-        </pc:sldMkLst>
-        <pc:spChg chg="mod">
-          <ac:chgData name="Riccardo Berta" userId="c8694f89-bba4-4576-b0a8-456619ca5a8c" providerId="ADAL" clId="{35C5D11B-424E-5B41-A9C4-509DD0A59BFD}" dt="2022-03-22T07:29:04.952" v="2"/>
-          <ac:spMkLst>
-            <pc:docMk/>
-            <pc:sldMk cId="0" sldId="272"/>
-            <ac:spMk id="201" creationId="{00000000-0000-0000-0000-000000000000}"/>
-          </ac:spMkLst>
-        </pc:spChg>
-      </pc:sldChg>
-      <pc:sldChg chg="modSp">
-        <pc:chgData name="Riccardo Berta" userId="c8694f89-bba4-4576-b0a8-456619ca5a8c" providerId="ADAL" clId="{35C5D11B-424E-5B41-A9C4-509DD0A59BFD}" dt="2022-03-22T07:48:04.230" v="39"/>
-        <pc:sldMkLst>
-          <pc:docMk/>
-          <pc:sldMk cId="0" sldId="273"/>
-        </pc:sldMkLst>
-        <pc:picChg chg="mod">
-          <ac:chgData name="Riccardo Berta" userId="c8694f89-bba4-4576-b0a8-456619ca5a8c" providerId="ADAL" clId="{35C5D11B-424E-5B41-A9C4-509DD0A59BFD}" dt="2022-03-22T07:48:04.230" v="39"/>
-          <ac:picMkLst>
-            <pc:docMk/>
-            <pc:sldMk cId="0" sldId="273"/>
-            <ac:picMk id="210" creationId="{00000000-0000-0000-0000-000000000000}"/>
-          </ac:picMkLst>
-        </pc:picChg>
-      </pc:sldChg>
-      <pc:sldChg chg="modSp">
-        <pc:chgData name="Riccardo Berta" userId="c8694f89-bba4-4576-b0a8-456619ca5a8c" providerId="ADAL" clId="{35C5D11B-424E-5B41-A9C4-509DD0A59BFD}" dt="2022-03-22T07:48:21.111" v="40"/>
-        <pc:sldMkLst>
-          <pc:docMk/>
-          <pc:sldMk cId="0" sldId="275"/>
-        </pc:sldMkLst>
-        <pc:picChg chg="mod">
-          <ac:chgData name="Riccardo Berta" userId="c8694f89-bba4-4576-b0a8-456619ca5a8c" providerId="ADAL" clId="{35C5D11B-424E-5B41-A9C4-509DD0A59BFD}" dt="2022-03-22T07:48:21.111" v="40"/>
-          <ac:picMkLst>
-            <pc:docMk/>
-            <pc:sldMk cId="0" sldId="275"/>
-            <ac:picMk id="224" creationId="{00000000-0000-0000-0000-000000000000}"/>
-          </ac:picMkLst>
-        </pc:picChg>
-      </pc:sldChg>
-    </pc:docChg>
-  </pc:docChgLst>
   <pc:docChgLst>
     <pc:chgData name="Riccardo Berta" userId="c8694f89-bba4-4576-b0a8-456619ca5a8c" providerId="ADAL" clId="{D3FAC85A-25C1-9641-B3D4-CF163FB38A40}"/>
     <pc:docChg chg="undo redo custSel modSld">
@@ -1141,6 +758,389 @@
       </pc:sldChg>
     </pc:docChg>
   </pc:docChgLst>
+  <pc:docChgLst>
+    <pc:chgData name="Riccardo Berta" userId="c8694f89-bba4-4576-b0a8-456619ca5a8c" providerId="ADAL" clId="{35C5D11B-424E-5B41-A9C4-509DD0A59BFD}"/>
+    <pc:docChg chg="custSel delSld modSld sldOrd">
+      <pc:chgData name="Riccardo Berta" userId="c8694f89-bba4-4576-b0a8-456619ca5a8c" providerId="ADAL" clId="{35C5D11B-424E-5B41-A9C4-509DD0A59BFD}" dt="2022-04-01T12:12:56.906" v="135" actId="20577"/>
+      <pc:docMkLst>
+        <pc:docMk/>
+      </pc:docMkLst>
+      <pc:sldChg chg="modSp">
+        <pc:chgData name="Riccardo Berta" userId="c8694f89-bba4-4576-b0a8-456619ca5a8c" providerId="ADAL" clId="{35C5D11B-424E-5B41-A9C4-509DD0A59BFD}" dt="2022-03-22T07:34:03.014" v="5"/>
+        <pc:sldMkLst>
+          <pc:docMk/>
+          <pc:sldMk cId="0" sldId="257"/>
+        </pc:sldMkLst>
+        <pc:picChg chg="mod">
+          <ac:chgData name="Riccardo Berta" userId="c8694f89-bba4-4576-b0a8-456619ca5a8c" providerId="ADAL" clId="{35C5D11B-424E-5B41-A9C4-509DD0A59BFD}" dt="2022-03-22T07:34:03.014" v="5"/>
+          <ac:picMkLst>
+            <pc:docMk/>
+            <pc:sldMk cId="0" sldId="257"/>
+            <ac:picMk id="85" creationId="{00000000-0000-0000-0000-000000000000}"/>
+          </ac:picMkLst>
+        </pc:picChg>
+      </pc:sldChg>
+      <pc:sldChg chg="modSp">
+        <pc:chgData name="Riccardo Berta" userId="c8694f89-bba4-4576-b0a8-456619ca5a8c" providerId="ADAL" clId="{35C5D11B-424E-5B41-A9C4-509DD0A59BFD}" dt="2022-03-22T07:34:23.187" v="6"/>
+        <pc:sldMkLst>
+          <pc:docMk/>
+          <pc:sldMk cId="0" sldId="258"/>
+        </pc:sldMkLst>
+        <pc:picChg chg="mod">
+          <ac:chgData name="Riccardo Berta" userId="c8694f89-bba4-4576-b0a8-456619ca5a8c" providerId="ADAL" clId="{35C5D11B-424E-5B41-A9C4-509DD0A59BFD}" dt="2022-03-22T07:34:23.187" v="6"/>
+          <ac:picMkLst>
+            <pc:docMk/>
+            <pc:sldMk cId="0" sldId="258"/>
+            <ac:picMk id="92" creationId="{00000000-0000-0000-0000-000000000000}"/>
+          </ac:picMkLst>
+        </pc:picChg>
+      </pc:sldChg>
+      <pc:sldChg chg="modSp">
+        <pc:chgData name="Riccardo Berta" userId="c8694f89-bba4-4576-b0a8-456619ca5a8c" providerId="ADAL" clId="{35C5D11B-424E-5B41-A9C4-509DD0A59BFD}" dt="2022-03-22T07:39:20.191" v="16"/>
+        <pc:sldMkLst>
+          <pc:docMk/>
+          <pc:sldMk cId="0" sldId="259"/>
+        </pc:sldMkLst>
+        <pc:picChg chg="mod">
+          <ac:chgData name="Riccardo Berta" userId="c8694f89-bba4-4576-b0a8-456619ca5a8c" providerId="ADAL" clId="{35C5D11B-424E-5B41-A9C4-509DD0A59BFD}" dt="2022-03-22T07:38:22.524" v="12"/>
+          <ac:picMkLst>
+            <pc:docMk/>
+            <pc:sldMk cId="0" sldId="259"/>
+            <ac:picMk id="99" creationId="{00000000-0000-0000-0000-000000000000}"/>
+          </ac:picMkLst>
+        </pc:picChg>
+        <pc:picChg chg="mod">
+          <ac:chgData name="Riccardo Berta" userId="c8694f89-bba4-4576-b0a8-456619ca5a8c" providerId="ADAL" clId="{35C5D11B-424E-5B41-A9C4-509DD0A59BFD}" dt="2022-03-22T07:38:34.539" v="13"/>
+          <ac:picMkLst>
+            <pc:docMk/>
+            <pc:sldMk cId="0" sldId="259"/>
+            <ac:picMk id="100" creationId="{00000000-0000-0000-0000-000000000000}"/>
+          </ac:picMkLst>
+        </pc:picChg>
+        <pc:picChg chg="mod">
+          <ac:chgData name="Riccardo Berta" userId="c8694f89-bba4-4576-b0a8-456619ca5a8c" providerId="ADAL" clId="{35C5D11B-424E-5B41-A9C4-509DD0A59BFD}" dt="2022-03-22T07:38:47.480" v="14"/>
+          <ac:picMkLst>
+            <pc:docMk/>
+            <pc:sldMk cId="0" sldId="259"/>
+            <ac:picMk id="101" creationId="{00000000-0000-0000-0000-000000000000}"/>
+          </ac:picMkLst>
+        </pc:picChg>
+        <pc:picChg chg="mod">
+          <ac:chgData name="Riccardo Berta" userId="c8694f89-bba4-4576-b0a8-456619ca5a8c" providerId="ADAL" clId="{35C5D11B-424E-5B41-A9C4-509DD0A59BFD}" dt="2022-03-22T07:38:59.538" v="15"/>
+          <ac:picMkLst>
+            <pc:docMk/>
+            <pc:sldMk cId="0" sldId="259"/>
+            <ac:picMk id="102" creationId="{00000000-0000-0000-0000-000000000000}"/>
+          </ac:picMkLst>
+        </pc:picChg>
+        <pc:picChg chg="mod">
+          <ac:chgData name="Riccardo Berta" userId="c8694f89-bba4-4576-b0a8-456619ca5a8c" providerId="ADAL" clId="{35C5D11B-424E-5B41-A9C4-509DD0A59BFD}" dt="2022-03-22T07:39:20.191" v="16"/>
+          <ac:picMkLst>
+            <pc:docMk/>
+            <pc:sldMk cId="0" sldId="259"/>
+            <ac:picMk id="103" creationId="{00000000-0000-0000-0000-000000000000}"/>
+          </ac:picMkLst>
+        </pc:picChg>
+      </pc:sldChg>
+      <pc:sldChg chg="modSp mod">
+        <pc:chgData name="Riccardo Berta" userId="c8694f89-bba4-4576-b0a8-456619ca5a8c" providerId="ADAL" clId="{35C5D11B-424E-5B41-A9C4-509DD0A59BFD}" dt="2022-03-23T07:58:19.601" v="41" actId="20577"/>
+        <pc:sldMkLst>
+          <pc:docMk/>
+          <pc:sldMk cId="0" sldId="260"/>
+        </pc:sldMkLst>
+        <pc:spChg chg="mod">
+          <ac:chgData name="Riccardo Berta" userId="c8694f89-bba4-4576-b0a8-456619ca5a8c" providerId="ADAL" clId="{35C5D11B-424E-5B41-A9C4-509DD0A59BFD}" dt="2022-03-23T07:58:19.601" v="41" actId="20577"/>
+          <ac:spMkLst>
+            <pc:docMk/>
+            <pc:sldMk cId="0" sldId="260"/>
+            <ac:spMk id="109" creationId="{00000000-0000-0000-0000-000000000000}"/>
+          </ac:spMkLst>
+        </pc:spChg>
+        <pc:picChg chg="mod">
+          <ac:chgData name="Riccardo Berta" userId="c8694f89-bba4-4576-b0a8-456619ca5a8c" providerId="ADAL" clId="{35C5D11B-424E-5B41-A9C4-509DD0A59BFD}" dt="2022-03-22T07:40:02.780" v="18"/>
+          <ac:picMkLst>
+            <pc:docMk/>
+            <pc:sldMk cId="0" sldId="260"/>
+            <ac:picMk id="110" creationId="{00000000-0000-0000-0000-000000000000}"/>
+          </ac:picMkLst>
+        </pc:picChg>
+        <pc:picChg chg="mod">
+          <ac:chgData name="Riccardo Berta" userId="c8694f89-bba4-4576-b0a8-456619ca5a8c" providerId="ADAL" clId="{35C5D11B-424E-5B41-A9C4-509DD0A59BFD}" dt="2022-03-22T07:39:46.143" v="17"/>
+          <ac:picMkLst>
+            <pc:docMk/>
+            <pc:sldMk cId="0" sldId="260"/>
+            <ac:picMk id="111" creationId="{00000000-0000-0000-0000-000000000000}"/>
+          </ac:picMkLst>
+        </pc:picChg>
+      </pc:sldChg>
+      <pc:sldChg chg="modSp">
+        <pc:chgData name="Riccardo Berta" userId="c8694f89-bba4-4576-b0a8-456619ca5a8c" providerId="ADAL" clId="{35C5D11B-424E-5B41-A9C4-509DD0A59BFD}" dt="2022-03-22T07:42:45.729" v="19"/>
+        <pc:sldMkLst>
+          <pc:docMk/>
+          <pc:sldMk cId="0" sldId="261"/>
+        </pc:sldMkLst>
+        <pc:picChg chg="mod">
+          <ac:chgData name="Riccardo Berta" userId="c8694f89-bba4-4576-b0a8-456619ca5a8c" providerId="ADAL" clId="{35C5D11B-424E-5B41-A9C4-509DD0A59BFD}" dt="2022-03-22T07:42:45.729" v="19"/>
+          <ac:picMkLst>
+            <pc:docMk/>
+            <pc:sldMk cId="0" sldId="261"/>
+            <ac:picMk id="119" creationId="{00000000-0000-0000-0000-000000000000}"/>
+          </ac:picMkLst>
+        </pc:picChg>
+      </pc:sldChg>
+      <pc:sldChg chg="modSp mod modNotes">
+        <pc:chgData name="Riccardo Berta" userId="c8694f89-bba4-4576-b0a8-456619ca5a8c" providerId="ADAL" clId="{35C5D11B-424E-5B41-A9C4-509DD0A59BFD}" dt="2022-03-25T14:38:53.205" v="88" actId="20577"/>
+        <pc:sldMkLst>
+          <pc:docMk/>
+          <pc:sldMk cId="0" sldId="262"/>
+        </pc:sldMkLst>
+        <pc:spChg chg="mod">
+          <ac:chgData name="Riccardo Berta" userId="c8694f89-bba4-4576-b0a8-456619ca5a8c" providerId="ADAL" clId="{35C5D11B-424E-5B41-A9C4-509DD0A59BFD}" dt="2022-03-25T14:38:53.205" v="88" actId="20577"/>
+          <ac:spMkLst>
+            <pc:docMk/>
+            <pc:sldMk cId="0" sldId="262"/>
+            <ac:spMk id="125" creationId="{00000000-0000-0000-0000-000000000000}"/>
+          </ac:spMkLst>
+        </pc:spChg>
+        <pc:picChg chg="mod">
+          <ac:chgData name="Riccardo Berta" userId="c8694f89-bba4-4576-b0a8-456619ca5a8c" providerId="ADAL" clId="{35C5D11B-424E-5B41-A9C4-509DD0A59BFD}" dt="2022-03-22T07:43:02.767" v="20"/>
+          <ac:picMkLst>
+            <pc:docMk/>
+            <pc:sldMk cId="0" sldId="262"/>
+            <ac:picMk id="126" creationId="{00000000-0000-0000-0000-000000000000}"/>
+          </ac:picMkLst>
+        </pc:picChg>
+      </pc:sldChg>
+      <pc:sldChg chg="modSp">
+        <pc:chgData name="Riccardo Berta" userId="c8694f89-bba4-4576-b0a8-456619ca5a8c" providerId="ADAL" clId="{35C5D11B-424E-5B41-A9C4-509DD0A59BFD}" dt="2022-03-22T07:43:16.691" v="21"/>
+        <pc:sldMkLst>
+          <pc:docMk/>
+          <pc:sldMk cId="0" sldId="263"/>
+        </pc:sldMkLst>
+        <pc:picChg chg="mod">
+          <ac:chgData name="Riccardo Berta" userId="c8694f89-bba4-4576-b0a8-456619ca5a8c" providerId="ADAL" clId="{35C5D11B-424E-5B41-A9C4-509DD0A59BFD}" dt="2022-03-22T07:43:16.691" v="21"/>
+          <ac:picMkLst>
+            <pc:docMk/>
+            <pc:sldMk cId="0" sldId="263"/>
+            <ac:picMk id="133" creationId="{00000000-0000-0000-0000-000000000000}"/>
+          </ac:picMkLst>
+        </pc:picChg>
+      </pc:sldChg>
+      <pc:sldChg chg="modSp mod">
+        <pc:chgData name="Riccardo Berta" userId="c8694f89-bba4-4576-b0a8-456619ca5a8c" providerId="ADAL" clId="{35C5D11B-424E-5B41-A9C4-509DD0A59BFD}" dt="2022-03-25T15:16:54.434" v="126" actId="20577"/>
+        <pc:sldMkLst>
+          <pc:docMk/>
+          <pc:sldMk cId="0" sldId="264"/>
+        </pc:sldMkLst>
+        <pc:spChg chg="mod">
+          <ac:chgData name="Riccardo Berta" userId="c8694f89-bba4-4576-b0a8-456619ca5a8c" providerId="ADAL" clId="{35C5D11B-424E-5B41-A9C4-509DD0A59BFD}" dt="2022-03-25T15:16:54.434" v="126" actId="20577"/>
+          <ac:spMkLst>
+            <pc:docMk/>
+            <pc:sldMk cId="0" sldId="264"/>
+            <ac:spMk id="139" creationId="{00000000-0000-0000-0000-000000000000}"/>
+          </ac:spMkLst>
+        </pc:spChg>
+        <pc:picChg chg="mod">
+          <ac:chgData name="Riccardo Berta" userId="c8694f89-bba4-4576-b0a8-456619ca5a8c" providerId="ADAL" clId="{35C5D11B-424E-5B41-A9C4-509DD0A59BFD}" dt="2022-03-22T07:43:33.267" v="22"/>
+          <ac:picMkLst>
+            <pc:docMk/>
+            <pc:sldMk cId="0" sldId="264"/>
+            <ac:picMk id="141" creationId="{00000000-0000-0000-0000-000000000000}"/>
+          </ac:picMkLst>
+        </pc:picChg>
+        <pc:picChg chg="mod">
+          <ac:chgData name="Riccardo Berta" userId="c8694f89-bba4-4576-b0a8-456619ca5a8c" providerId="ADAL" clId="{35C5D11B-424E-5B41-A9C4-509DD0A59BFD}" dt="2022-03-22T07:43:50.362" v="23"/>
+          <ac:picMkLst>
+            <pc:docMk/>
+            <pc:sldMk cId="0" sldId="264"/>
+            <ac:picMk id="142" creationId="{00000000-0000-0000-0000-000000000000}"/>
+          </ac:picMkLst>
+        </pc:picChg>
+      </pc:sldChg>
+      <pc:sldChg chg="modSp">
+        <pc:chgData name="Riccardo Berta" userId="c8694f89-bba4-4576-b0a8-456619ca5a8c" providerId="ADAL" clId="{35C5D11B-424E-5B41-A9C4-509DD0A59BFD}" dt="2022-03-22T07:44:03.240" v="24"/>
+        <pc:sldMkLst>
+          <pc:docMk/>
+          <pc:sldMk cId="0" sldId="265"/>
+        </pc:sldMkLst>
+        <pc:picChg chg="mod">
+          <ac:chgData name="Riccardo Berta" userId="c8694f89-bba4-4576-b0a8-456619ca5a8c" providerId="ADAL" clId="{35C5D11B-424E-5B41-A9C4-509DD0A59BFD}" dt="2022-03-22T07:44:03.240" v="24"/>
+          <ac:picMkLst>
+            <pc:docMk/>
+            <pc:sldMk cId="0" sldId="265"/>
+            <ac:picMk id="149" creationId="{00000000-0000-0000-0000-000000000000}"/>
+          </ac:picMkLst>
+        </pc:picChg>
+      </pc:sldChg>
+      <pc:sldChg chg="modSp">
+        <pc:chgData name="Riccardo Berta" userId="c8694f89-bba4-4576-b0a8-456619ca5a8c" providerId="ADAL" clId="{35C5D11B-424E-5B41-A9C4-509DD0A59BFD}" dt="2022-03-22T07:44:22.734" v="25"/>
+        <pc:sldMkLst>
+          <pc:docMk/>
+          <pc:sldMk cId="0" sldId="266"/>
+        </pc:sldMkLst>
+        <pc:picChg chg="mod">
+          <ac:chgData name="Riccardo Berta" userId="c8694f89-bba4-4576-b0a8-456619ca5a8c" providerId="ADAL" clId="{35C5D11B-424E-5B41-A9C4-509DD0A59BFD}" dt="2022-03-22T07:44:22.734" v="25"/>
+          <ac:picMkLst>
+            <pc:docMk/>
+            <pc:sldMk cId="0" sldId="266"/>
+            <ac:picMk id="156" creationId="{00000000-0000-0000-0000-000000000000}"/>
+          </ac:picMkLst>
+        </pc:picChg>
+      </pc:sldChg>
+      <pc:sldChg chg="modSp mod">
+        <pc:chgData name="Riccardo Berta" userId="c8694f89-bba4-4576-b0a8-456619ca5a8c" providerId="ADAL" clId="{35C5D11B-424E-5B41-A9C4-509DD0A59BFD}" dt="2022-04-01T12:12:56.906" v="135" actId="20577"/>
+        <pc:sldMkLst>
+          <pc:docMk/>
+          <pc:sldMk cId="0" sldId="267"/>
+        </pc:sldMkLst>
+        <pc:spChg chg="mod">
+          <ac:chgData name="Riccardo Berta" userId="c8694f89-bba4-4576-b0a8-456619ca5a8c" providerId="ADAL" clId="{35C5D11B-424E-5B41-A9C4-509DD0A59BFD}" dt="2022-04-01T12:12:56.906" v="135" actId="20577"/>
+          <ac:spMkLst>
+            <pc:docMk/>
+            <pc:sldMk cId="0" sldId="267"/>
+            <ac:spMk id="162" creationId="{00000000-0000-0000-0000-000000000000}"/>
+          </ac:spMkLst>
+        </pc:spChg>
+        <pc:picChg chg="mod">
+          <ac:chgData name="Riccardo Berta" userId="c8694f89-bba4-4576-b0a8-456619ca5a8c" providerId="ADAL" clId="{35C5D11B-424E-5B41-A9C4-509DD0A59BFD}" dt="2022-03-22T07:44:34.392" v="26"/>
+          <ac:picMkLst>
+            <pc:docMk/>
+            <pc:sldMk cId="0" sldId="267"/>
+            <ac:picMk id="163" creationId="{00000000-0000-0000-0000-000000000000}"/>
+          </ac:picMkLst>
+        </pc:picChg>
+      </pc:sldChg>
+      <pc:sldChg chg="del">
+        <pc:chgData name="Riccardo Berta" userId="c8694f89-bba4-4576-b0a8-456619ca5a8c" providerId="ADAL" clId="{35C5D11B-424E-5B41-A9C4-509DD0A59BFD}" dt="2022-03-22T07:29:13.529" v="3" actId="2696"/>
+        <pc:sldMkLst>
+          <pc:docMk/>
+          <pc:sldMk cId="0" sldId="268"/>
+        </pc:sldMkLst>
+      </pc:sldChg>
+      <pc:sldChg chg="modSp">
+        <pc:chgData name="Riccardo Berta" userId="c8694f89-bba4-4576-b0a8-456619ca5a8c" providerId="ADAL" clId="{35C5D11B-424E-5B41-A9C4-509DD0A59BFD}" dt="2022-03-22T07:44:59.403" v="28"/>
+        <pc:sldMkLst>
+          <pc:docMk/>
+          <pc:sldMk cId="0" sldId="269"/>
+        </pc:sldMkLst>
+        <pc:picChg chg="mod">
+          <ac:chgData name="Riccardo Berta" userId="c8694f89-bba4-4576-b0a8-456619ca5a8c" providerId="ADAL" clId="{35C5D11B-424E-5B41-A9C4-509DD0A59BFD}" dt="2022-03-22T07:44:47.754" v="27"/>
+          <ac:picMkLst>
+            <pc:docMk/>
+            <pc:sldMk cId="0" sldId="269"/>
+            <ac:picMk id="176" creationId="{00000000-0000-0000-0000-000000000000}"/>
+          </ac:picMkLst>
+        </pc:picChg>
+        <pc:picChg chg="mod">
+          <ac:chgData name="Riccardo Berta" userId="c8694f89-bba4-4576-b0a8-456619ca5a8c" providerId="ADAL" clId="{35C5D11B-424E-5B41-A9C4-509DD0A59BFD}" dt="2022-03-22T07:44:59.403" v="28"/>
+          <ac:picMkLst>
+            <pc:docMk/>
+            <pc:sldMk cId="0" sldId="269"/>
+            <ac:picMk id="177" creationId="{00000000-0000-0000-0000-000000000000}"/>
+          </ac:picMkLst>
+        </pc:picChg>
+      </pc:sldChg>
+      <pc:sldChg chg="modSp mod">
+        <pc:chgData name="Riccardo Berta" userId="c8694f89-bba4-4576-b0a8-456619ca5a8c" providerId="ADAL" clId="{35C5D11B-424E-5B41-A9C4-509DD0A59BFD}" dt="2022-03-22T07:47:03.443" v="33"/>
+        <pc:sldMkLst>
+          <pc:docMk/>
+          <pc:sldMk cId="0" sldId="270"/>
+        </pc:sldMkLst>
+        <pc:picChg chg="mod">
+          <ac:chgData name="Riccardo Berta" userId="c8694f89-bba4-4576-b0a8-456619ca5a8c" providerId="ADAL" clId="{35C5D11B-424E-5B41-A9C4-509DD0A59BFD}" dt="2022-03-22T07:46:52.226" v="32"/>
+          <ac:picMkLst>
+            <pc:docMk/>
+            <pc:sldMk cId="0" sldId="270"/>
+            <ac:picMk id="184" creationId="{00000000-0000-0000-0000-000000000000}"/>
+          </ac:picMkLst>
+        </pc:picChg>
+        <pc:picChg chg="mod">
+          <ac:chgData name="Riccardo Berta" userId="c8694f89-bba4-4576-b0a8-456619ca5a8c" providerId="ADAL" clId="{35C5D11B-424E-5B41-A9C4-509DD0A59BFD}" dt="2022-03-22T07:47:03.443" v="33"/>
+          <ac:picMkLst>
+            <pc:docMk/>
+            <pc:sldMk cId="0" sldId="270"/>
+            <ac:picMk id="185" creationId="{00000000-0000-0000-0000-000000000000}"/>
+          </ac:picMkLst>
+        </pc:picChg>
+      </pc:sldChg>
+      <pc:sldChg chg="modSp mod">
+        <pc:chgData name="Riccardo Berta" userId="c8694f89-bba4-4576-b0a8-456619ca5a8c" providerId="ADAL" clId="{35C5D11B-424E-5B41-A9C4-509DD0A59BFD}" dt="2022-03-22T07:47:51.976" v="38"/>
+        <pc:sldMkLst>
+          <pc:docMk/>
+          <pc:sldMk cId="0" sldId="271"/>
+        </pc:sldMkLst>
+        <pc:picChg chg="mod">
+          <ac:chgData name="Riccardo Berta" userId="c8694f89-bba4-4576-b0a8-456619ca5a8c" providerId="ADAL" clId="{35C5D11B-424E-5B41-A9C4-509DD0A59BFD}" dt="2022-03-22T07:47:14.728" v="34"/>
+          <ac:picMkLst>
+            <pc:docMk/>
+            <pc:sldMk cId="0" sldId="271"/>
+            <ac:picMk id="193" creationId="{00000000-0000-0000-0000-000000000000}"/>
+          </ac:picMkLst>
+        </pc:picChg>
+        <pc:picChg chg="mod">
+          <ac:chgData name="Riccardo Berta" userId="c8694f89-bba4-4576-b0a8-456619ca5a8c" providerId="ADAL" clId="{35C5D11B-424E-5B41-A9C4-509DD0A59BFD}" dt="2022-03-22T07:47:31.485" v="36"/>
+          <ac:picMkLst>
+            <pc:docMk/>
+            <pc:sldMk cId="0" sldId="271"/>
+            <ac:picMk id="194" creationId="{00000000-0000-0000-0000-000000000000}"/>
+          </ac:picMkLst>
+        </pc:picChg>
+        <pc:picChg chg="mod">
+          <ac:chgData name="Riccardo Berta" userId="c8694f89-bba4-4576-b0a8-456619ca5a8c" providerId="ADAL" clId="{35C5D11B-424E-5B41-A9C4-509DD0A59BFD}" dt="2022-03-22T07:47:51.976" v="38"/>
+          <ac:picMkLst>
+            <pc:docMk/>
+            <pc:sldMk cId="0" sldId="271"/>
+            <ac:picMk id="195" creationId="{00000000-0000-0000-0000-000000000000}"/>
+          </ac:picMkLst>
+        </pc:picChg>
+      </pc:sldChg>
+      <pc:sldChg chg="modSp mod ord">
+        <pc:chgData name="Riccardo Berta" userId="c8694f89-bba4-4576-b0a8-456619ca5a8c" providerId="ADAL" clId="{35C5D11B-424E-5B41-A9C4-509DD0A59BFD}" dt="2022-03-22T07:29:04.952" v="2"/>
+        <pc:sldMkLst>
+          <pc:docMk/>
+          <pc:sldMk cId="0" sldId="272"/>
+        </pc:sldMkLst>
+        <pc:spChg chg="mod">
+          <ac:chgData name="Riccardo Berta" userId="c8694f89-bba4-4576-b0a8-456619ca5a8c" providerId="ADAL" clId="{35C5D11B-424E-5B41-A9C4-509DD0A59BFD}" dt="2022-03-22T07:29:04.952" v="2"/>
+          <ac:spMkLst>
+            <pc:docMk/>
+            <pc:sldMk cId="0" sldId="272"/>
+            <ac:spMk id="201" creationId="{00000000-0000-0000-0000-000000000000}"/>
+          </ac:spMkLst>
+        </pc:spChg>
+      </pc:sldChg>
+      <pc:sldChg chg="modSp">
+        <pc:chgData name="Riccardo Berta" userId="c8694f89-bba4-4576-b0a8-456619ca5a8c" providerId="ADAL" clId="{35C5D11B-424E-5B41-A9C4-509DD0A59BFD}" dt="2022-03-22T07:48:04.230" v="39"/>
+        <pc:sldMkLst>
+          <pc:docMk/>
+          <pc:sldMk cId="0" sldId="273"/>
+        </pc:sldMkLst>
+        <pc:picChg chg="mod">
+          <ac:chgData name="Riccardo Berta" userId="c8694f89-bba4-4576-b0a8-456619ca5a8c" providerId="ADAL" clId="{35C5D11B-424E-5B41-A9C4-509DD0A59BFD}" dt="2022-03-22T07:48:04.230" v="39"/>
+          <ac:picMkLst>
+            <pc:docMk/>
+            <pc:sldMk cId="0" sldId="273"/>
+            <ac:picMk id="210" creationId="{00000000-0000-0000-0000-000000000000}"/>
+          </ac:picMkLst>
+        </pc:picChg>
+      </pc:sldChg>
+      <pc:sldChg chg="modSp">
+        <pc:chgData name="Riccardo Berta" userId="c8694f89-bba4-4576-b0a8-456619ca5a8c" providerId="ADAL" clId="{35C5D11B-424E-5B41-A9C4-509DD0A59BFD}" dt="2022-03-22T07:48:21.111" v="40"/>
+        <pc:sldMkLst>
+          <pc:docMk/>
+          <pc:sldMk cId="0" sldId="275"/>
+        </pc:sldMkLst>
+        <pc:picChg chg="mod">
+          <ac:chgData name="Riccardo Berta" userId="c8694f89-bba4-4576-b0a8-456619ca5a8c" providerId="ADAL" clId="{35C5D11B-424E-5B41-A9C4-509DD0A59BFD}" dt="2022-03-22T07:48:21.111" v="40"/>
+          <ac:picMkLst>
+            <pc:docMk/>
+            <pc:sldMk cId="0" sldId="275"/>
+            <ac:picMk id="224" creationId="{00000000-0000-0000-0000-000000000000}"/>
+          </ac:picMkLst>
+        </pc:picChg>
+      </pc:sldChg>
+    </pc:docChg>
+  </pc:docChgLst>
 </pc:chgInfo>
 </file>
 
@@ -1677,7 +1677,7 @@
               </a:spcAft>
               <a:buNone/>
             </a:pPr>
-            <a:endParaRPr/>
+            <a:endParaRPr dirty="0"/>
           </a:p>
         </p:txBody>
       </p:sp>
@@ -10328,23 +10328,7 @@
             </a:r>
             <a:r>
               <a:rPr lang="en-GB" dirty="0"/>
-              <a:t>) XXX </a:t>
-            </a:r>
-            <a:r>
-              <a:rPr lang="en-GB" dirty="0" err="1"/>
-              <a:t>controllare</a:t>
-            </a:r>
-            <a:r>
-              <a:rPr lang="en-GB" dirty="0"/>
-              <a:t> </a:t>
-            </a:r>
-            <a:r>
-              <a:rPr lang="en-GB" dirty="0" err="1"/>
-              <a:t>libreria</a:t>
-            </a:r>
-            <a:r>
-              <a:rPr lang="en-GB"/>
-              <a:t> Node</a:t>
+              <a:t>)</a:t>
             </a:r>
             <a:endParaRPr dirty="0"/>
           </a:p>
@@ -14156,7 +14140,7 @@
           <a:p>
             <a:r>
               <a:rPr lang="en-GB" dirty="0"/>
-              <a:t>Improve the file server in order to create folders. Add support for a method PUT, which should create a directory by calling </a:t>
+              <a:t>Improve the file server to create folders. Add support for a method PUT, which should create a directory by calling </a:t>
             </a:r>
             <a:r>
               <a:rPr lang="en-GB" dirty="0" err="1"/>
@@ -14204,7 +14188,7 @@
             </a:pPr>
             <a:r>
               <a:rPr lang="en-GB" dirty="0"/>
-              <a:t>Improve the Twitter application in order to provide a support for hashtags. The term in the URL path of a GET is the hashtag, the server has to provide just the posts containing that word</a:t>
+              <a:t>Improve the Twitter application to provide a support for hashtags. The term in the URL path of a GET is the hashtag, the server must provide just the posts containing that word</a:t>
             </a:r>
             <a:endParaRPr dirty="0"/>
           </a:p>
